--- a/img/Hello! I’m Aaron.pptx
+++ b/img/Hello! I’m Aaron.pptx
@@ -6,6 +6,7 @@
   </p:sldMasterIdLst>
   <p:sldIdLst>
     <p:sldId id="256" r:id="rId2"/>
+    <p:sldId id="257" r:id="rId3"/>
   </p:sldIdLst>
   <p:sldSz cx="12192000" cy="6858000"/>
   <p:notesSz cx="6858000" cy="9144000"/>
@@ -104,6 +105,11 @@
       </a:defRPr>
     </a:lvl9pPr>
   </p:defaultTextStyle>
+  <p:extLst>
+    <p:ext uri="{EFAFB233-063F-42B5-8137-9DF3F51BA10A}">
+      <p15:sldGuideLst xmlns:p15="http://schemas.microsoft.com/office/powerpoint/2012/main"/>
+    </p:ext>
+  </p:extLst>
 </p:presentation>
 </file>
 
@@ -3425,6 +3431,154 @@
 </p:sld>
 </file>
 
+<file path=ppt/slides/slide2.xml><?xml version="1.0" encoding="utf-8"?>
+<p:sld xmlns:a="http://schemas.openxmlformats.org/drawingml/2006/main" xmlns:r="http://schemas.openxmlformats.org/officeDocument/2006/relationships" xmlns:p="http://schemas.openxmlformats.org/presentationml/2006/main">
+  <p:cSld>
+    <p:spTree>
+      <p:nvGrpSpPr>
+        <p:cNvPr id="1" name=""/>
+        <p:cNvGrpSpPr/>
+        <p:nvPr/>
+      </p:nvGrpSpPr>
+      <p:grpSpPr>
+        <a:xfrm>
+          <a:off x="0" y="0"/>
+          <a:ext cx="0" cy="0"/>
+          <a:chOff x="0" y="0"/>
+          <a:chExt cx="0" cy="0"/>
+        </a:xfrm>
+      </p:grpSpPr>
+      <p:sp>
+        <p:nvSpPr>
+          <p:cNvPr id="2" name="標題 1">
+            <a:extLst>
+              <a:ext uri="{FF2B5EF4-FFF2-40B4-BE49-F238E27FC236}">
+                <a16:creationId xmlns:a16="http://schemas.microsoft.com/office/drawing/2014/main" id="{2D089E88-B383-CDEF-DE95-31317D986AC6}"/>
+              </a:ext>
+            </a:extLst>
+          </p:cNvPr>
+          <p:cNvSpPr>
+            <a:spLocks noGrp="1"/>
+          </p:cNvSpPr>
+          <p:nvPr>
+            <p:ph type="ctrTitle"/>
+          </p:nvPr>
+        </p:nvSpPr>
+        <p:spPr>
+          <a:xfrm>
+            <a:off x="1524000" y="2378225"/>
+            <a:ext cx="9144000" cy="1131738"/>
+          </a:xfrm>
+        </p:spPr>
+        <p:txBody>
+          <a:bodyPr/>
+          <a:lstStyle/>
+          <a:p>
+            <a:r>
+              <a:rPr lang="en-US" altLang="zh-TW" dirty="0">
+                <a:solidFill>
+                  <a:schemeClr val="accent1">
+                    <a:lumMod val="60000"/>
+                    <a:lumOff val="40000"/>
+                  </a:schemeClr>
+                </a:solidFill>
+                <a:latin typeface="Ink Free" panose="03080402000500000000" pitchFamily="66" charset="0"/>
+                <a:cs typeface="MV Boli" panose="02000500030200090000" pitchFamily="2" charset="0"/>
+              </a:rPr>
+              <a:t>Hello! I’m Aaron</a:t>
+            </a:r>
+            <a:endParaRPr lang="zh-TW" altLang="en-US" dirty="0">
+              <a:solidFill>
+                <a:schemeClr val="accent1">
+                  <a:lumMod val="60000"/>
+                  <a:lumOff val="40000"/>
+                </a:schemeClr>
+              </a:solidFill>
+              <a:latin typeface="Ink Free" panose="03080402000500000000" pitchFamily="66" charset="0"/>
+              <a:cs typeface="MV Boli" panose="02000500030200090000" pitchFamily="2" charset="0"/>
+            </a:endParaRPr>
+          </a:p>
+        </p:txBody>
+      </p:sp>
+      <p:sp>
+        <p:nvSpPr>
+          <p:cNvPr id="4" name="文字方塊 3">
+            <a:extLst>
+              <a:ext uri="{FF2B5EF4-FFF2-40B4-BE49-F238E27FC236}">
+                <a16:creationId xmlns:a16="http://schemas.microsoft.com/office/drawing/2014/main" id="{0A382EFF-6183-7685-1692-F71A4A4D3B12}"/>
+              </a:ext>
+            </a:extLst>
+          </p:cNvPr>
+          <p:cNvSpPr txBox="1"/>
+          <p:nvPr/>
+        </p:nvSpPr>
+        <p:spPr>
+          <a:xfrm>
+            <a:off x="4116761" y="3500405"/>
+            <a:ext cx="4254119" cy="369332"/>
+          </a:xfrm>
+          <a:prstGeom prst="rect">
+            <a:avLst/>
+          </a:prstGeom>
+          <a:noFill/>
+        </p:spPr>
+        <p:txBody>
+          <a:bodyPr wrap="square" rtlCol="0">
+            <a:spAutoFit/>
+          </a:bodyPr>
+          <a:lstStyle/>
+          <a:p>
+            <a:pPr algn="ctr"/>
+            <a:r>
+              <a:rPr lang="en-US" altLang="zh-TW" dirty="0">
+                <a:solidFill>
+                  <a:schemeClr val="bg1">
+                    <a:lumMod val="75000"/>
+                  </a:schemeClr>
+                </a:solidFill>
+                <a:latin typeface="Times New Roman" panose="02020603050405020304" pitchFamily="18" charset="0"/>
+                <a:cs typeface="Times New Roman" panose="02020603050405020304" pitchFamily="18" charset="0"/>
+              </a:rPr>
+              <a:t>Keep Going Forward</a:t>
+            </a:r>
+            <a:r>
+              <a:rPr lang="zh-TW" altLang="en-US" dirty="0">
+                <a:solidFill>
+                  <a:schemeClr val="bg1">
+                    <a:lumMod val="75000"/>
+                  </a:schemeClr>
+                </a:solidFill>
+                <a:effectLst/>
+                <a:latin typeface="Times New Roman" panose="02020603050405020304" pitchFamily="18" charset="0"/>
+                <a:cs typeface="Times New Roman" panose="02020603050405020304" pitchFamily="18" charset="0"/>
+              </a:rPr>
+              <a:t>🗻</a:t>
+            </a:r>
+            <a:endParaRPr lang="zh-TW" altLang="en-US" dirty="0">
+              <a:solidFill>
+                <a:schemeClr val="bg1">
+                  <a:lumMod val="75000"/>
+                </a:schemeClr>
+              </a:solidFill>
+              <a:latin typeface="Times New Roman" panose="02020603050405020304" pitchFamily="18" charset="0"/>
+              <a:cs typeface="Times New Roman" panose="02020603050405020304" pitchFamily="18" charset="0"/>
+            </a:endParaRPr>
+          </a:p>
+        </p:txBody>
+      </p:sp>
+    </p:spTree>
+    <p:extLst>
+      <p:ext uri="{BB962C8B-B14F-4D97-AF65-F5344CB8AC3E}">
+        <p14:creationId xmlns:p14="http://schemas.microsoft.com/office/powerpoint/2010/main" val="1443776913"/>
+      </p:ext>
+    </p:extLst>
+  </p:cSld>
+  <p:clrMapOvr>
+    <a:masterClrMapping/>
+  </p:clrMapOvr>
+</p:sld>
+</file>
+
 <file path=ppt/theme/theme1.xml><?xml version="1.0" encoding="utf-8"?>
 <a:theme xmlns:a="http://schemas.openxmlformats.org/drawingml/2006/main" name="Office 佈景主題">
   <a:themeElements>
